--- a/docs/tema1/diapositivas/spring-boot-fundamentos.pptx
+++ b/docs/tema1/diapositivas/spring-boot-fundamentos.pptx
@@ -5,7 +5,7 @@
     <p:sldMasterId id="2147483648" r:id="rId1"/>
   </p:sldMasterIdLst>
   <p:notesMasterIdLst>
-    <p:notesMasterId r:id="rId23"/>
+    <p:notesMasterId r:id="rId24"/>
   </p:notesMasterIdLst>
   <p:sldIdLst>
     <p:sldId id="256" r:id="rId2"/>
@@ -14,21 +14,22 @@
     <p:sldId id="259" r:id="rId5"/>
     <p:sldId id="260" r:id="rId6"/>
     <p:sldId id="261" r:id="rId7"/>
-    <p:sldId id="262" r:id="rId8"/>
-    <p:sldId id="263" r:id="rId9"/>
-    <p:sldId id="264" r:id="rId10"/>
-    <p:sldId id="265" r:id="rId11"/>
-    <p:sldId id="266" r:id="rId12"/>
-    <p:sldId id="267" r:id="rId13"/>
-    <p:sldId id="268" r:id="rId14"/>
-    <p:sldId id="269" r:id="rId15"/>
-    <p:sldId id="270" r:id="rId16"/>
-    <p:sldId id="271" r:id="rId17"/>
-    <p:sldId id="272" r:id="rId18"/>
-    <p:sldId id="273" r:id="rId19"/>
-    <p:sldId id="274" r:id="rId20"/>
-    <p:sldId id="275" r:id="rId21"/>
-    <p:sldId id="276" r:id="rId22"/>
+    <p:sldId id="277" r:id="rId8"/>
+    <p:sldId id="262" r:id="rId9"/>
+    <p:sldId id="263" r:id="rId10"/>
+    <p:sldId id="264" r:id="rId11"/>
+    <p:sldId id="265" r:id="rId12"/>
+    <p:sldId id="266" r:id="rId13"/>
+    <p:sldId id="267" r:id="rId14"/>
+    <p:sldId id="268" r:id="rId15"/>
+    <p:sldId id="269" r:id="rId16"/>
+    <p:sldId id="270" r:id="rId17"/>
+    <p:sldId id="271" r:id="rId18"/>
+    <p:sldId id="272" r:id="rId19"/>
+    <p:sldId id="273" r:id="rId20"/>
+    <p:sldId id="274" r:id="rId21"/>
+    <p:sldId id="275" r:id="rId22"/>
+    <p:sldId id="276" r:id="rId23"/>
   </p:sldIdLst>
   <p:sldSz cx="12192000" cy="6858000"/>
   <p:notesSz cx="6858000" cy="12192000"/>
@@ -1433,6 +1434,90 @@
 </p:notes>
 </file>
 
+<file path=ppt/notesSlides/notesSlide22.xml><?xml version="1.0" encoding="utf-8"?>
+<p:notes xmlns:a="http://schemas.openxmlformats.org/drawingml/2006/main" xmlns:r="http://schemas.openxmlformats.org/officeDocument/2006/relationships" xmlns:p="http://schemas.openxmlformats.org/presentationml/2006/main">
+  <p:cSld>
+    <p:spTree>
+      <p:nvGrpSpPr>
+        <p:cNvPr id="1" name=""/>
+        <p:cNvGrpSpPr/>
+        <p:nvPr/>
+      </p:nvGrpSpPr>
+      <p:grpSpPr>
+        <a:xfrm>
+          <a:off x="0" y="0"/>
+          <a:ext cx="0" cy="0"/>
+          <a:chOff x="0" y="0"/>
+          <a:chExt cx="0" cy="0"/>
+        </a:xfrm>
+      </p:grpSpPr>
+      <p:sp>
+        <p:nvSpPr>
+          <p:cNvPr id="2" name="Slide Image Placeholder 1"/>
+          <p:cNvSpPr>
+            <a:spLocks noGrp="1" noRot="1" noChangeAspect="1"/>
+          </p:cNvSpPr>
+          <p:nvPr>
+            <p:ph type="sldImg"/>
+          </p:nvPr>
+        </p:nvSpPr>
+        <p:spPr/>
+      </p:sp>
+      <p:sp>
+        <p:nvSpPr>
+          <p:cNvPr id="3" name="Notes Placeholder 2"/>
+          <p:cNvSpPr>
+            <a:spLocks noGrp="1"/>
+          </p:cNvSpPr>
+          <p:nvPr>
+            <p:ph type="body" idx="1"/>
+          </p:nvPr>
+        </p:nvSpPr>
+        <p:spPr/>
+        <p:txBody>
+          <a:bodyPr/>
+          <a:lstStyle/>
+          <a:p>
+            <a:endParaRPr lang="en-US" dirty="0"/>
+          </a:p>
+        </p:txBody>
+      </p:sp>
+      <p:sp>
+        <p:nvSpPr>
+          <p:cNvPr id="4" name="Slide Number Placeholder 3"/>
+          <p:cNvSpPr>
+            <a:spLocks noGrp="1"/>
+          </p:cNvSpPr>
+          <p:nvPr>
+            <p:ph type="sldNum" sz="quarter" idx="10"/>
+          </p:nvPr>
+        </p:nvSpPr>
+        <p:spPr/>
+        <p:txBody>
+          <a:bodyPr/>
+          <a:lstStyle/>
+          <a:p>
+            <a:fld id="{F7021451-1387-4CA6-816F-3879F97B5CBC}" type="slidenum">
+              <a:rPr lang="en-US"/>
+              <a:t>22</a:t>
+            </a:fld>
+            <a:endParaRPr lang="en-US"/>
+          </a:p>
+        </p:txBody>
+      </p:sp>
+    </p:spTree>
+    <p:extLst>
+      <p:ext uri="{BB962C8B-B14F-4D97-AF65-F5344CB8AC3E}">
+        <p14:creationId xmlns:p14="http://schemas.microsoft.com/office/powerpoint/2010/main" val="1024086991"/>
+      </p:ext>
+    </p:extLst>
+  </p:cSld>
+  <p:clrMapOvr>
+    <a:masterClrMapping/>
+  </p:clrMapOvr>
+</p:notes>
+</file>
+
 <file path=ppt/notesSlides/notesSlide3.xml><?xml version="1.0" encoding="utf-8"?>
 <p:notes xmlns:a="http://schemas.openxmlformats.org/drawingml/2006/main" xmlns:r="http://schemas.openxmlformats.org/officeDocument/2006/relationships" xmlns:p="http://schemas.openxmlformats.org/presentationml/2006/main">
   <p:cSld>
@@ -1774,7 +1859,13 @@
   <p:cSld>
     <p:spTree>
       <p:nvGrpSpPr>
-        <p:cNvPr id="1" name=""/>
+        <p:cNvPr id="1" name="">
+          <a:extLst>
+            <a:ext uri="{FF2B5EF4-FFF2-40B4-BE49-F238E27FC236}">
+              <a16:creationId xmlns:a16="http://schemas.microsoft.com/office/drawing/2014/main" id="{9FC6639F-0156-F9FC-C1BC-C136EEF83489}"/>
+            </a:ext>
+          </a:extLst>
+        </p:cNvPr>
         <p:cNvGrpSpPr/>
         <p:nvPr/>
       </p:nvGrpSpPr>
@@ -1788,7 +1879,13 @@
       </p:grpSpPr>
       <p:sp>
         <p:nvSpPr>
-          <p:cNvPr id="2" name="Slide Image Placeholder 1"/>
+          <p:cNvPr id="2" name="Slide Image Placeholder 1">
+            <a:extLst>
+              <a:ext uri="{FF2B5EF4-FFF2-40B4-BE49-F238E27FC236}">
+                <a16:creationId xmlns:a16="http://schemas.microsoft.com/office/drawing/2014/main" id="{315D38FF-23EF-A4A9-15F3-BF877DEBAEA6}"/>
+              </a:ext>
+            </a:extLst>
+          </p:cNvPr>
           <p:cNvSpPr>
             <a:spLocks noGrp="1" noRot="1" noChangeAspect="1"/>
           </p:cNvSpPr>
@@ -1800,7 +1897,13 @@
       </p:sp>
       <p:sp>
         <p:nvSpPr>
-          <p:cNvPr id="3" name="Notes Placeholder 2"/>
+          <p:cNvPr id="3" name="Notes Placeholder 2">
+            <a:extLst>
+              <a:ext uri="{FF2B5EF4-FFF2-40B4-BE49-F238E27FC236}">
+                <a16:creationId xmlns:a16="http://schemas.microsoft.com/office/drawing/2014/main" id="{1D720027-10CD-77E1-CBB7-4A35BFD384D9}"/>
+              </a:ext>
+            </a:extLst>
+          </p:cNvPr>
           <p:cNvSpPr>
             <a:spLocks noGrp="1"/>
           </p:cNvSpPr>
@@ -1819,7 +1922,13 @@
       </p:sp>
       <p:sp>
         <p:nvSpPr>
-          <p:cNvPr id="4" name="Slide Number Placeholder 3"/>
+          <p:cNvPr id="4" name="Slide Number Placeholder 3">
+            <a:extLst>
+              <a:ext uri="{FF2B5EF4-FFF2-40B4-BE49-F238E27FC236}">
+                <a16:creationId xmlns:a16="http://schemas.microsoft.com/office/drawing/2014/main" id="{ECEDB905-174C-A1ED-112F-BDEC74ADA855}"/>
+              </a:ext>
+            </a:extLst>
+          </p:cNvPr>
           <p:cNvSpPr>
             <a:spLocks noGrp="1"/>
           </p:cNvSpPr>
@@ -1843,7 +1952,7 @@
     </p:spTree>
     <p:extLst>
       <p:ext uri="{BB962C8B-B14F-4D97-AF65-F5344CB8AC3E}">
-        <p14:creationId xmlns:p14="http://schemas.microsoft.com/office/powerpoint/2010/main" val="1024086991"/>
+        <p14:creationId xmlns:p14="http://schemas.microsoft.com/office/powerpoint/2010/main" val="2103229601"/>
       </p:ext>
     </p:extLst>
   </p:cSld>
@@ -2534,6 +2643,297 @@
 
 <file path=ppt/slides/slide10.xml><?xml version="1.0" encoding="utf-8"?>
 <p:sld xmlns:a="http://schemas.openxmlformats.org/drawingml/2006/main" xmlns:r="http://schemas.openxmlformats.org/officeDocument/2006/relationships" xmlns:p="http://schemas.openxmlformats.org/presentationml/2006/main">
+  <p:cSld name="Slide 9">
+    <p:spTree>
+      <p:nvGrpSpPr>
+        <p:cNvPr id="1" name=""/>
+        <p:cNvGrpSpPr/>
+        <p:nvPr/>
+      </p:nvGrpSpPr>
+      <p:grpSpPr>
+        <a:xfrm>
+          <a:off x="0" y="0"/>
+          <a:ext cx="0" cy="0"/>
+          <a:chOff x="0" y="0"/>
+          <a:chExt cx="0" cy="0"/>
+        </a:xfrm>
+      </p:grpSpPr>
+      <p:sp>
+        <p:nvSpPr>
+          <p:cNvPr id="2" name="Shape 0"/>
+          <p:cNvSpPr/>
+          <p:nvPr/>
+        </p:nvSpPr>
+        <p:spPr>
+          <a:xfrm>
+            <a:off x="0" y="0"/>
+            <a:ext cx="12188952" cy="777240"/>
+          </a:xfrm>
+          <a:prstGeom prst="rect">
+            <a:avLst/>
+          </a:prstGeom>
+          <a:solidFill>
+            <a:srgbClr val="7F0000"/>
+          </a:solidFill>
+          <a:ln w="12700">
+            <a:solidFill>
+              <a:srgbClr val="7F0000"/>
+            </a:solidFill>
+            <a:prstDash val="solid"/>
+          </a:ln>
+        </p:spPr>
+        <p:txBody>
+          <a:bodyPr/>
+          <a:lstStyle/>
+          <a:p>
+            <a:endParaRPr lang="es-ES"/>
+          </a:p>
+        </p:txBody>
+      </p:sp>
+      <p:sp>
+        <p:nvSpPr>
+          <p:cNvPr id="3" name="Text 1"/>
+          <p:cNvSpPr/>
+          <p:nvPr/>
+        </p:nvSpPr>
+        <p:spPr>
+          <a:xfrm>
+            <a:off x="365760" y="0"/>
+            <a:ext cx="11457432" cy="777240"/>
+          </a:xfrm>
+          <a:prstGeom prst="rect">
+            <a:avLst/>
+          </a:prstGeom>
+          <a:noFill/>
+          <a:ln/>
+        </p:spPr>
+        <p:txBody>
+          <a:bodyPr wrap="square" rtlCol="0" anchor="ctr"/>
+          <a:lstStyle/>
+          <a:p>
+            <a:pPr marL="0" indent="0">
+              <a:buNone/>
+            </a:pPr>
+            <a:r>
+              <a:rPr lang="en-US" sz="2600" b="1" dirty="0">
+                <a:solidFill>
+                  <a:srgbClr val="FFFFFF"/>
+                </a:solidFill>
+                <a:latin typeface="Arial" pitchFamily="34" charset="0"/>
+                <a:ea typeface="Arial" pitchFamily="34" charset="-122"/>
+                <a:cs typeface="Arial" pitchFamily="34" charset="-120"/>
+              </a:rPr>
+              <a:t>La arquitectura en capas (cont.)</a:t>
+            </a:r>
+            <a:endParaRPr lang="en-US" sz="2600" dirty="0"/>
+          </a:p>
+        </p:txBody>
+      </p:sp>
+      <p:sp>
+        <p:nvSpPr>
+          <p:cNvPr id="4" name="Text 2"/>
+          <p:cNvSpPr/>
+          <p:nvPr/>
+        </p:nvSpPr>
+        <p:spPr>
+          <a:xfrm>
+            <a:off x="548640" y="6473952"/>
+            <a:ext cx="11091672" cy="292608"/>
+          </a:xfrm>
+          <a:prstGeom prst="rect">
+            <a:avLst/>
+          </a:prstGeom>
+          <a:noFill/>
+          <a:ln/>
+        </p:spPr>
+        <p:txBody>
+          <a:bodyPr wrap="square" rtlCol="0" anchor="ctr"/>
+          <a:lstStyle/>
+          <a:p>
+            <a:pPr marL="0" indent="0" algn="r">
+              <a:buNone/>
+            </a:pPr>
+            <a:r>
+              <a:rPr lang="en-US" sz="1100" dirty="0">
+                <a:solidFill>
+                  <a:srgbClr val="757575"/>
+                </a:solidFill>
+                <a:latin typeface="Arial" pitchFamily="34" charset="0"/>
+                <a:ea typeface="Arial" pitchFamily="34" charset="-122"/>
+                <a:cs typeface="Arial" pitchFamily="34" charset="-120"/>
+              </a:rPr>
+              <a:t>Acceso a Datos — Tema 1: Fundamentos de Spring Boot</a:t>
+            </a:r>
+            <a:endParaRPr lang="en-US" sz="1100" dirty="0"/>
+          </a:p>
+        </p:txBody>
+      </p:sp>
+      <p:sp>
+        <p:nvSpPr>
+          <p:cNvPr id="5" name="Text 3"/>
+          <p:cNvSpPr/>
+          <p:nvPr/>
+        </p:nvSpPr>
+        <p:spPr>
+          <a:xfrm>
+            <a:off x="548640" y="1371600"/>
+            <a:ext cx="11091672" cy="2286000"/>
+          </a:xfrm>
+          <a:prstGeom prst="rect">
+            <a:avLst/>
+          </a:prstGeom>
+          <a:noFill/>
+          <a:ln/>
+        </p:spPr>
+        <p:txBody>
+          <a:bodyPr wrap="square" rtlCol="0" anchor="t"/>
+          <a:lstStyle/>
+          <a:p>
+            <a:pPr marL="190500" indent="-190500">
+              <a:spcAft>
+                <a:spcPts val="1600"/>
+              </a:spcAft>
+              <a:buSzPct val="100000"/>
+              <a:buChar char="•"/>
+            </a:pPr>
+            <a:r>
+              <a:rPr lang="en-US" sz="1900" dirty="0">
+                <a:solidFill>
+                  <a:srgbClr val="212121"/>
+                </a:solidFill>
+                <a:latin typeface="Arial" pitchFamily="34" charset="0"/>
+                <a:ea typeface="Arial" pitchFamily="34" charset="-122"/>
+                <a:cs typeface="Arial" pitchFamily="34" charset="-120"/>
+              </a:rPr>
+              <a:t>Controller (LibroController) — recibe la petición HTTP y la traduce a una llamada Java. No contiene lógica de negocio, solo enruta.</a:t>
+            </a:r>
+            <a:endParaRPr lang="en-US" sz="1900" dirty="0"/>
+          </a:p>
+          <a:p>
+            <a:pPr marL="190500" indent="-190500">
+              <a:spcAft>
+                <a:spcPts val="1600"/>
+              </a:spcAft>
+              <a:buSzPct val="100000"/>
+              <a:buChar char="•"/>
+            </a:pPr>
+            <a:r>
+              <a:rPr lang="en-US" sz="1900" dirty="0">
+                <a:solidFill>
+                  <a:srgbClr val="212121"/>
+                </a:solidFill>
+                <a:latin typeface="Arial" pitchFamily="34" charset="0"/>
+                <a:ea typeface="Arial" pitchFamily="34" charset="-122"/>
+                <a:cs typeface="Arial" pitchFamily="34" charset="-120"/>
+              </a:rPr>
+              <a:t>Service (LibroService) — contiene la lógica: qué hay que comprobar, qué hay que calcular, en qué orden.</a:t>
+            </a:r>
+            <a:endParaRPr lang="en-US" sz="1900" dirty="0"/>
+          </a:p>
+          <a:p>
+            <a:pPr marL="190500" indent="-190500">
+              <a:spcAft>
+                <a:spcPts val="1600"/>
+              </a:spcAft>
+              <a:buSzPct val="100000"/>
+              <a:buChar char="•"/>
+            </a:pPr>
+            <a:r>
+              <a:rPr lang="en-US" sz="1900" dirty="0">
+                <a:solidFill>
+                  <a:srgbClr val="212121"/>
+                </a:solidFill>
+                <a:latin typeface="Arial" pitchFamily="34" charset="0"/>
+                <a:ea typeface="Arial" pitchFamily="34" charset="-122"/>
+                <a:cs typeface="Arial" pitchFamily="34" charset="-120"/>
+              </a:rPr>
+              <a:t>Repository (LibroRepository) — es quien habla con la base de datos.</a:t>
+            </a:r>
+            <a:endParaRPr lang="en-US" sz="1900" dirty="0"/>
+          </a:p>
+        </p:txBody>
+      </p:sp>
+      <p:sp>
+        <p:nvSpPr>
+          <p:cNvPr id="6" name="Shape 4"/>
+          <p:cNvSpPr/>
+          <p:nvPr/>
+        </p:nvSpPr>
+        <p:spPr>
+          <a:xfrm>
+            <a:off x="548640" y="3977640"/>
+            <a:ext cx="11091672" cy="1371600"/>
+          </a:xfrm>
+          <a:prstGeom prst="roundRect">
+            <a:avLst/>
+          </a:prstGeom>
+          <a:solidFill>
+            <a:srgbClr val="FBE9E7"/>
+          </a:solidFill>
+          <a:ln w="19050">
+            <a:solidFill>
+              <a:srgbClr val="E64A19"/>
+            </a:solidFill>
+            <a:prstDash val="solid"/>
+          </a:ln>
+        </p:spPr>
+        <p:txBody>
+          <a:bodyPr/>
+          <a:lstStyle/>
+          <a:p>
+            <a:endParaRPr lang="es-ES"/>
+          </a:p>
+        </p:txBody>
+      </p:sp>
+      <p:sp>
+        <p:nvSpPr>
+          <p:cNvPr id="7" name="Text 5"/>
+          <p:cNvSpPr/>
+          <p:nvPr/>
+        </p:nvSpPr>
+        <p:spPr>
+          <a:xfrm>
+            <a:off x="822960" y="4069080"/>
+            <a:ext cx="10543032" cy="1188720"/>
+          </a:xfrm>
+          <a:prstGeom prst="rect">
+            <a:avLst/>
+          </a:prstGeom>
+          <a:noFill/>
+          <a:ln/>
+        </p:spPr>
+        <p:txBody>
+          <a:bodyPr wrap="square" rtlCol="0" anchor="ctr"/>
+          <a:lstStyle/>
+          <a:p>
+            <a:pPr marL="0" indent="0">
+              <a:buNone/>
+            </a:pPr>
+            <a:r>
+              <a:rPr lang="en-US" sz="1800" dirty="0">
+                <a:solidFill>
+                  <a:srgbClr val="212121"/>
+                </a:solidFill>
+                <a:latin typeface="Arial" pitchFamily="34" charset="0"/>
+                <a:ea typeface="Arial" pitchFamily="34" charset="-122"/>
+                <a:cs typeface="Arial" pitchFamily="34" charset="-120"/>
+              </a:rPr>
+              <a:t>¿Por qué separar así? Cada capa se puede entender, probar y cambiar sin tocar las demás: si cambia la base de datos, solo se toca el repository; si cambia una regla de negocio, solo el service. Regla: cada capa habla solo con la siguiente — el controller nunca accede directamente a la base de datos.</a:t>
+            </a:r>
+            <a:endParaRPr lang="en-US" sz="1800" dirty="0"/>
+          </a:p>
+        </p:txBody>
+      </p:sp>
+    </p:spTree>
+  </p:cSld>
+  <p:clrMapOvr>
+    <a:masterClrMapping/>
+  </p:clrMapOvr>
+</p:sld>
+</file>
+
+<file path=ppt/slides/slide11.xml><?xml version="1.0" encoding="utf-8"?>
+<p:sld xmlns:a="http://schemas.openxmlformats.org/drawingml/2006/main" xmlns:r="http://schemas.openxmlformats.org/officeDocument/2006/relationships" xmlns:p="http://schemas.openxmlformats.org/presentationml/2006/main">
   <p:cSld name="Slide 10">
     <p:spTree>
       <p:nvGrpSpPr>
@@ -2914,7 +3314,7 @@
 </p:sld>
 </file>
 
-<file path=ppt/slides/slide11.xml><?xml version="1.0" encoding="utf-8"?>
+<file path=ppt/slides/slide12.xml><?xml version="1.0" encoding="utf-8"?>
 <p:sld xmlns:a="http://schemas.openxmlformats.org/drawingml/2006/main" xmlns:r="http://schemas.openxmlformats.org/officeDocument/2006/relationships" xmlns:p="http://schemas.openxmlformats.org/presentationml/2006/main">
   <p:cSld name="Slide 11">
     <p:spTree>
@@ -3327,7 +3727,7 @@
 </p:sld>
 </file>
 
-<file path=ppt/slides/slide12.xml><?xml version="1.0" encoding="utf-8"?>
+<file path=ppt/slides/slide13.xml><?xml version="1.0" encoding="utf-8"?>
 <p:sld xmlns:a="http://schemas.openxmlformats.org/drawingml/2006/main" xmlns:r="http://schemas.openxmlformats.org/officeDocument/2006/relationships" xmlns:p="http://schemas.openxmlformats.org/presentationml/2006/main">
   <p:cSld name="Slide 12">
     <p:spTree>
@@ -3596,7 +3996,7 @@
 </p:sld>
 </file>
 
-<file path=ppt/slides/slide13.xml><?xml version="1.0" encoding="utf-8"?>
+<file path=ppt/slides/slide14.xml><?xml version="1.0" encoding="utf-8"?>
 <p:sld xmlns:a="http://schemas.openxmlformats.org/drawingml/2006/main" xmlns:r="http://schemas.openxmlformats.org/officeDocument/2006/relationships" xmlns:p="http://schemas.openxmlformats.org/presentationml/2006/main">
   <p:cSld name="Slide 13">
     <p:spTree>
@@ -3967,7 +4367,7 @@
 </p:sld>
 </file>
 
-<file path=ppt/slides/slide14.xml><?xml version="1.0" encoding="utf-8"?>
+<file path=ppt/slides/slide15.xml><?xml version="1.0" encoding="utf-8"?>
 <p:sld xmlns:a="http://schemas.openxmlformats.org/drawingml/2006/main" xmlns:r="http://schemas.openxmlformats.org/officeDocument/2006/relationships" xmlns:p="http://schemas.openxmlformats.org/presentationml/2006/main">
   <p:cSld name="Slide 14">
     <p:spTree>
@@ -4969,7 +5369,7 @@
 </p:sld>
 </file>
 
-<file path=ppt/slides/slide15.xml><?xml version="1.0" encoding="utf-8"?>
+<file path=ppt/slides/slide16.xml><?xml version="1.0" encoding="utf-8"?>
 <p:sld xmlns:a="http://schemas.openxmlformats.org/drawingml/2006/main" xmlns:r="http://schemas.openxmlformats.org/officeDocument/2006/relationships" xmlns:p="http://schemas.openxmlformats.org/presentationml/2006/main">
   <p:cSld name="Slide 15">
     <p:spTree>
@@ -5472,7 +5872,7 @@
 </p:sld>
 </file>
 
-<file path=ppt/slides/slide16.xml><?xml version="1.0" encoding="utf-8"?>
+<file path=ppt/slides/slide17.xml><?xml version="1.0" encoding="utf-8"?>
 <p:sld xmlns:a="http://schemas.openxmlformats.org/drawingml/2006/main" xmlns:r="http://schemas.openxmlformats.org/officeDocument/2006/relationships" xmlns:p="http://schemas.openxmlformats.org/presentationml/2006/main">
   <p:cSld name="Slide 16">
     <p:spTree>
@@ -5911,7 +6311,7 @@
 </p:sld>
 </file>
 
-<file path=ppt/slides/slide17.xml><?xml version="1.0" encoding="utf-8"?>
+<file path=ppt/slides/slide18.xml><?xml version="1.0" encoding="utf-8"?>
 <p:sld xmlns:a="http://schemas.openxmlformats.org/drawingml/2006/main" xmlns:r="http://schemas.openxmlformats.org/officeDocument/2006/relationships" xmlns:p="http://schemas.openxmlformats.org/presentationml/2006/main">
   <p:cSld name="Slide 17">
     <p:spTree>
@@ -6346,7 +6746,7 @@
 </p:sld>
 </file>
 
-<file path=ppt/slides/slide18.xml><?xml version="1.0" encoding="utf-8"?>
+<file path=ppt/slides/slide19.xml><?xml version="1.0" encoding="utf-8"?>
 <p:sld xmlns:a="http://schemas.openxmlformats.org/drawingml/2006/main" xmlns:r="http://schemas.openxmlformats.org/officeDocument/2006/relationships" xmlns:p="http://schemas.openxmlformats.org/presentationml/2006/main">
   <p:cSld name="Slide 18">
     <p:spTree>
@@ -6619,251 +7019,6 @@
               <a:t>Ese -dev en el nombre es un perfil: un conjunto de configuración que solo se activa si le dices a Spring Boot que lo use al arrancar. El mismo código puede arrancar con configuración distinta según el entorno (desarrollo, tests, producción) sin tocar una línea de Java.</a:t>
             </a:r>
             <a:endParaRPr lang="en-US" sz="1800" dirty="0"/>
-          </a:p>
-        </p:txBody>
-      </p:sp>
-    </p:spTree>
-  </p:cSld>
-  <p:clrMapOvr>
-    <a:masterClrMapping/>
-  </p:clrMapOvr>
-</p:sld>
-</file>
-
-<file path=ppt/slides/slide19.xml><?xml version="1.0" encoding="utf-8"?>
-<p:sld xmlns:a="http://schemas.openxmlformats.org/drawingml/2006/main" xmlns:r="http://schemas.openxmlformats.org/officeDocument/2006/relationships" xmlns:p="http://schemas.openxmlformats.org/presentationml/2006/main">
-  <p:cSld name="Slide 19">
-    <p:spTree>
-      <p:nvGrpSpPr>
-        <p:cNvPr id="1" name=""/>
-        <p:cNvGrpSpPr/>
-        <p:nvPr/>
-      </p:nvGrpSpPr>
-      <p:grpSpPr>
-        <a:xfrm>
-          <a:off x="0" y="0"/>
-          <a:ext cx="0" cy="0"/>
-          <a:chOff x="0" y="0"/>
-          <a:chExt cx="0" cy="0"/>
-        </a:xfrm>
-      </p:grpSpPr>
-      <p:sp>
-        <p:nvSpPr>
-          <p:cNvPr id="2" name="Shape 0"/>
-          <p:cNvSpPr/>
-          <p:nvPr/>
-        </p:nvSpPr>
-        <p:spPr>
-          <a:xfrm>
-            <a:off x="0" y="0"/>
-            <a:ext cx="12188952" cy="777240"/>
-          </a:xfrm>
-          <a:prstGeom prst="rect">
-            <a:avLst/>
-          </a:prstGeom>
-          <a:solidFill>
-            <a:srgbClr val="7F0000"/>
-          </a:solidFill>
-          <a:ln w="12700">
-            <a:solidFill>
-              <a:srgbClr val="7F0000"/>
-            </a:solidFill>
-            <a:prstDash val="solid"/>
-          </a:ln>
-        </p:spPr>
-        <p:txBody>
-          <a:bodyPr/>
-          <a:lstStyle/>
-          <a:p>
-            <a:endParaRPr lang="es-ES"/>
-          </a:p>
-        </p:txBody>
-      </p:sp>
-      <p:sp>
-        <p:nvSpPr>
-          <p:cNvPr id="3" name="Text 1"/>
-          <p:cNvSpPr/>
-          <p:nvPr/>
-        </p:nvSpPr>
-        <p:spPr>
-          <a:xfrm>
-            <a:off x="365760" y="0"/>
-            <a:ext cx="11457432" cy="777240"/>
-          </a:xfrm>
-          <a:prstGeom prst="rect">
-            <a:avLst/>
-          </a:prstGeom>
-          <a:noFill/>
-          <a:ln/>
-        </p:spPr>
-        <p:txBody>
-          <a:bodyPr wrap="square" rtlCol="0" anchor="ctr"/>
-          <a:lstStyle/>
-          <a:p>
-            <a:pPr marL="0" indent="0">
-              <a:buNone/>
-            </a:pPr>
-            <a:r>
-              <a:rPr lang="en-US" sz="2600" b="1" dirty="0">
-                <a:solidFill>
-                  <a:srgbClr val="FFFFFF"/>
-                </a:solidFill>
-                <a:latin typeface="Arial" pitchFamily="34" charset="0"/>
-                <a:ea typeface="Arial" pitchFamily="34" charset="-122"/>
-                <a:cs typeface="Arial" pitchFamily="34" charset="-120"/>
-              </a:rPr>
-              <a:t>Dónde estás y hacia dónde vas</a:t>
-            </a:r>
-            <a:endParaRPr lang="en-US" sz="2600" dirty="0"/>
-          </a:p>
-        </p:txBody>
-      </p:sp>
-      <p:sp>
-        <p:nvSpPr>
-          <p:cNvPr id="4" name="Text 2"/>
-          <p:cNvSpPr/>
-          <p:nvPr/>
-        </p:nvSpPr>
-        <p:spPr>
-          <a:xfrm>
-            <a:off x="548640" y="6473952"/>
-            <a:ext cx="11091672" cy="292608"/>
-          </a:xfrm>
-          <a:prstGeom prst="rect">
-            <a:avLst/>
-          </a:prstGeom>
-          <a:noFill/>
-          <a:ln/>
-        </p:spPr>
-        <p:txBody>
-          <a:bodyPr wrap="square" rtlCol="0" anchor="ctr"/>
-          <a:lstStyle/>
-          <a:p>
-            <a:pPr marL="0" indent="0" algn="r">
-              <a:buNone/>
-            </a:pPr>
-            <a:r>
-              <a:rPr lang="en-US" sz="1100" dirty="0">
-                <a:solidFill>
-                  <a:srgbClr val="757575"/>
-                </a:solidFill>
-                <a:latin typeface="Arial" pitchFamily="34" charset="0"/>
-                <a:ea typeface="Arial" pitchFamily="34" charset="-122"/>
-                <a:cs typeface="Arial" pitchFamily="34" charset="-120"/>
-              </a:rPr>
-              <a:t>Acceso a Datos — Tema 1: Fundamentos de Spring Boot</a:t>
-            </a:r>
-            <a:endParaRPr lang="en-US" sz="1100" dirty="0"/>
-          </a:p>
-        </p:txBody>
-      </p:sp>
-      <p:sp>
-        <p:nvSpPr>
-          <p:cNvPr id="5" name="Shape 3"/>
-          <p:cNvSpPr/>
-          <p:nvPr/>
-        </p:nvSpPr>
-        <p:spPr>
-          <a:xfrm>
-            <a:off x="548640" y="1920240"/>
-            <a:ext cx="11091672" cy="2103120"/>
-          </a:xfrm>
-          <a:prstGeom prst="roundRect">
-            <a:avLst/>
-          </a:prstGeom>
-          <a:solidFill>
-            <a:srgbClr val="FBE9E7"/>
-          </a:solidFill>
-          <a:ln w="19050">
-            <a:solidFill>
-              <a:srgbClr val="E64A19"/>
-            </a:solidFill>
-            <a:prstDash val="solid"/>
-          </a:ln>
-        </p:spPr>
-        <p:txBody>
-          <a:bodyPr/>
-          <a:lstStyle/>
-          <a:p>
-            <a:endParaRPr lang="es-ES"/>
-          </a:p>
-        </p:txBody>
-      </p:sp>
-      <p:sp>
-        <p:nvSpPr>
-          <p:cNvPr id="6" name="Text 4"/>
-          <p:cNvSpPr/>
-          <p:nvPr/>
-        </p:nvSpPr>
-        <p:spPr>
-          <a:xfrm>
-            <a:off x="822960" y="2011680"/>
-            <a:ext cx="10543032" cy="1920240"/>
-          </a:xfrm>
-          <a:prstGeom prst="rect">
-            <a:avLst/>
-          </a:prstGeom>
-          <a:noFill/>
-          <a:ln/>
-        </p:spPr>
-        <p:txBody>
-          <a:bodyPr wrap="square" rtlCol="0" anchor="ctr"/>
-          <a:lstStyle/>
-          <a:p>
-            <a:pPr marL="0" indent="0">
-              <a:buNone/>
-            </a:pPr>
-            <a:r>
-              <a:rPr lang="en-US" sz="2100" dirty="0">
-                <a:solidFill>
-                  <a:srgbClr val="212121"/>
-                </a:solidFill>
-                <a:latin typeface="Arial" pitchFamily="34" charset="0"/>
-                <a:ea typeface="Arial" pitchFamily="34" charset="-122"/>
-                <a:cs typeface="Arial" pitchFamily="34" charset="-120"/>
-              </a:rPr>
-              <a:t>Estas piezas —el proyecto Maven, las capas, la inyección de dependencias, la configuración— las vas a trabajar durante todo el curso desde dos módulos a la vez: en Acceso a Datos te centrarás en la persistencia, todo lo que hay del service hacia abajo (JDBC, JPA, JSONB, MongoDB); en Programación de Servicios y Procesos te centrarás en los servicios en red y la seguridad, del controller hacia fuera (REST, JWT, hilos, sockets).</a:t>
-            </a:r>
-            <a:endParaRPr lang="en-US" sz="2100" dirty="0"/>
-          </a:p>
-        </p:txBody>
-      </p:sp>
-      <p:sp>
-        <p:nvSpPr>
-          <p:cNvPr id="7" name="Text 5"/>
-          <p:cNvSpPr/>
-          <p:nvPr/>
-        </p:nvSpPr>
-        <p:spPr>
-          <a:xfrm>
-            <a:off x="548640" y="4389120"/>
-            <a:ext cx="11091672" cy="548640"/>
-          </a:xfrm>
-          <a:prstGeom prst="rect">
-            <a:avLst/>
-          </a:prstGeom>
-          <a:noFill/>
-          <a:ln/>
-        </p:spPr>
-        <p:txBody>
-          <a:bodyPr wrap="square" rtlCol="0" anchor="t"/>
-          <a:lstStyle/>
-          <a:p>
-            <a:pPr marL="0" indent="0" algn="ctr">
-              <a:buNone/>
-            </a:pPr>
-            <a:r>
-              <a:rPr lang="en-US" sz="1900" i="1" dirty="0">
-                <a:solidFill>
-                  <a:srgbClr val="757575"/>
-                </a:solidFill>
-                <a:latin typeface="Arial" pitchFamily="34" charset="0"/>
-                <a:ea typeface="Arial" pitchFamily="34" charset="-122"/>
-                <a:cs typeface="Arial" pitchFamily="34" charset="-120"/>
-              </a:rPr>
-              <a:t>En las actividades de ambos módulos irás construyendo, pieza a pieza, tu propia aplicación con esta misma estructura.</a:t>
-            </a:r>
-            <a:endParaRPr lang="en-US" sz="1900" dirty="0"/>
           </a:p>
         </p:txBody>
       </p:sp>
@@ -7122,6 +7277,282 @@
 
 <file path=ppt/slides/slide20.xml><?xml version="1.0" encoding="utf-8"?>
 <p:sld xmlns:a="http://schemas.openxmlformats.org/drawingml/2006/main" xmlns:r="http://schemas.openxmlformats.org/officeDocument/2006/relationships" xmlns:p="http://schemas.openxmlformats.org/presentationml/2006/main">
+  <p:cSld name="Slide 19">
+    <p:spTree>
+      <p:nvGrpSpPr>
+        <p:cNvPr id="1" name=""/>
+        <p:cNvGrpSpPr/>
+        <p:nvPr/>
+      </p:nvGrpSpPr>
+      <p:grpSpPr>
+        <a:xfrm>
+          <a:off x="0" y="0"/>
+          <a:ext cx="0" cy="0"/>
+          <a:chOff x="0" y="0"/>
+          <a:chExt cx="0" cy="0"/>
+        </a:xfrm>
+      </p:grpSpPr>
+      <p:sp>
+        <p:nvSpPr>
+          <p:cNvPr id="2" name="Shape 0"/>
+          <p:cNvSpPr/>
+          <p:nvPr/>
+        </p:nvSpPr>
+        <p:spPr>
+          <a:xfrm>
+            <a:off x="0" y="0"/>
+            <a:ext cx="12188952" cy="777240"/>
+          </a:xfrm>
+          <a:prstGeom prst="rect">
+            <a:avLst/>
+          </a:prstGeom>
+          <a:solidFill>
+            <a:srgbClr val="7F0000"/>
+          </a:solidFill>
+          <a:ln w="12700">
+            <a:solidFill>
+              <a:srgbClr val="7F0000"/>
+            </a:solidFill>
+            <a:prstDash val="solid"/>
+          </a:ln>
+        </p:spPr>
+        <p:txBody>
+          <a:bodyPr/>
+          <a:lstStyle/>
+          <a:p>
+            <a:endParaRPr lang="es-ES"/>
+          </a:p>
+        </p:txBody>
+      </p:sp>
+      <p:sp>
+        <p:nvSpPr>
+          <p:cNvPr id="3" name="Text 1"/>
+          <p:cNvSpPr/>
+          <p:nvPr/>
+        </p:nvSpPr>
+        <p:spPr>
+          <a:xfrm>
+            <a:off x="365760" y="0"/>
+            <a:ext cx="11457432" cy="777240"/>
+          </a:xfrm>
+          <a:prstGeom prst="rect">
+            <a:avLst/>
+          </a:prstGeom>
+          <a:noFill/>
+          <a:ln/>
+        </p:spPr>
+        <p:txBody>
+          <a:bodyPr wrap="square" rtlCol="0" anchor="ctr"/>
+          <a:lstStyle/>
+          <a:p>
+            <a:pPr marL="0" indent="0">
+              <a:buNone/>
+            </a:pPr>
+            <a:r>
+              <a:rPr lang="en-US" sz="2600" b="1" dirty="0">
+                <a:solidFill>
+                  <a:srgbClr val="FFFFFF"/>
+                </a:solidFill>
+                <a:latin typeface="Arial" pitchFamily="34" charset="0"/>
+                <a:ea typeface="Arial" pitchFamily="34" charset="-122"/>
+                <a:cs typeface="Arial" pitchFamily="34" charset="-120"/>
+              </a:rPr>
+              <a:t>Dónde estás y hacia dónde vas</a:t>
+            </a:r>
+            <a:endParaRPr lang="en-US" sz="2600" dirty="0"/>
+          </a:p>
+        </p:txBody>
+      </p:sp>
+      <p:sp>
+        <p:nvSpPr>
+          <p:cNvPr id="4" name="Text 2"/>
+          <p:cNvSpPr/>
+          <p:nvPr/>
+        </p:nvSpPr>
+        <p:spPr>
+          <a:xfrm>
+            <a:off x="548640" y="6473952"/>
+            <a:ext cx="11091672" cy="292608"/>
+          </a:xfrm>
+          <a:prstGeom prst="rect">
+            <a:avLst/>
+          </a:prstGeom>
+          <a:noFill/>
+          <a:ln/>
+        </p:spPr>
+        <p:txBody>
+          <a:bodyPr wrap="square" rtlCol="0" anchor="ctr"/>
+          <a:lstStyle/>
+          <a:p>
+            <a:pPr marL="0" indent="0" algn="r">
+              <a:buNone/>
+            </a:pPr>
+            <a:r>
+              <a:rPr lang="en-US" sz="1100" dirty="0">
+                <a:solidFill>
+                  <a:srgbClr val="757575"/>
+                </a:solidFill>
+                <a:latin typeface="Arial" pitchFamily="34" charset="0"/>
+                <a:ea typeface="Arial" pitchFamily="34" charset="-122"/>
+                <a:cs typeface="Arial" pitchFamily="34" charset="-120"/>
+              </a:rPr>
+              <a:t>Acceso a Datos — Tema 1: Fundamentos de Spring Boot</a:t>
+            </a:r>
+            <a:endParaRPr lang="en-US" sz="1100" dirty="0"/>
+          </a:p>
+        </p:txBody>
+      </p:sp>
+      <p:sp>
+        <p:nvSpPr>
+          <p:cNvPr id="5" name="Shape 3"/>
+          <p:cNvSpPr/>
+          <p:nvPr/>
+        </p:nvSpPr>
+        <p:spPr>
+          <a:xfrm>
+            <a:off x="548640" y="4450701"/>
+            <a:ext cx="11091672" cy="1367829"/>
+          </a:xfrm>
+          <a:prstGeom prst="roundRect">
+            <a:avLst/>
+          </a:prstGeom>
+          <a:solidFill>
+            <a:srgbClr val="FBE9E7"/>
+          </a:solidFill>
+          <a:ln w="19050">
+            <a:solidFill>
+              <a:srgbClr val="E64A19"/>
+            </a:solidFill>
+            <a:prstDash val="solid"/>
+          </a:ln>
+        </p:spPr>
+        <p:txBody>
+          <a:bodyPr/>
+          <a:lstStyle/>
+          <a:p>
+            <a:endParaRPr lang="es-ES"/>
+          </a:p>
+        </p:txBody>
+      </p:sp>
+      <p:sp>
+        <p:nvSpPr>
+          <p:cNvPr id="6" name="Text 4"/>
+          <p:cNvSpPr/>
+          <p:nvPr/>
+        </p:nvSpPr>
+        <p:spPr>
+          <a:xfrm>
+            <a:off x="822960" y="4128734"/>
+            <a:ext cx="10543032" cy="1920240"/>
+          </a:xfrm>
+          <a:prstGeom prst="rect">
+            <a:avLst/>
+          </a:prstGeom>
+          <a:noFill/>
+          <a:ln/>
+        </p:spPr>
+        <p:txBody>
+          <a:bodyPr wrap="square" rtlCol="0" anchor="ctr"/>
+          <a:lstStyle/>
+          <a:p>
+            <a:pPr marL="0" indent="0">
+              <a:buNone/>
+            </a:pPr>
+            <a:r>
+              <a:rPr lang="en-US" sz="1600" dirty="0">
+                <a:solidFill>
+                  <a:srgbClr val="212121"/>
+                </a:solidFill>
+                <a:latin typeface="Arial" pitchFamily="34" charset="0"/>
+                <a:ea typeface="Arial" pitchFamily="34" charset="-122"/>
+                <a:cs typeface="Arial" pitchFamily="34" charset="-120"/>
+              </a:rPr>
+              <a:t>Estas piezas —el proyecto Maven, las capas, la inyección de dependencias, la configuración— las vas a trabajar durante todo el curso desde dos módulos a la vez: en Acceso a Datos te centrarás en la persistencia, todo lo que hay del service hacia abajo (JDBC, JPA, JSONB, MongoDB); en Programación de Servicios y Procesos te centrarás en los servicios en red y la seguridad, del controller hacia fuera (REST, JWT, hilos, sockets).</a:t>
+            </a:r>
+            <a:endParaRPr lang="en-US" sz="1600" dirty="0"/>
+          </a:p>
+        </p:txBody>
+      </p:sp>
+      <p:sp>
+        <p:nvSpPr>
+          <p:cNvPr id="7" name="Text 5"/>
+          <p:cNvSpPr/>
+          <p:nvPr/>
+        </p:nvSpPr>
+        <p:spPr>
+          <a:xfrm>
+            <a:off x="548640" y="5941695"/>
+            <a:ext cx="11091672" cy="548640"/>
+          </a:xfrm>
+          <a:prstGeom prst="rect">
+            <a:avLst/>
+          </a:prstGeom>
+          <a:noFill/>
+          <a:ln/>
+        </p:spPr>
+        <p:txBody>
+          <a:bodyPr wrap="square" rtlCol="0" anchor="t"/>
+          <a:lstStyle/>
+          <a:p>
+            <a:pPr marL="0" indent="0" algn="ctr">
+              <a:buNone/>
+            </a:pPr>
+            <a:r>
+              <a:rPr lang="en-US" sz="1900" i="1" dirty="0">
+                <a:solidFill>
+                  <a:srgbClr val="757575"/>
+                </a:solidFill>
+                <a:latin typeface="Arial" pitchFamily="34" charset="0"/>
+                <a:ea typeface="Arial" pitchFamily="34" charset="-122"/>
+                <a:cs typeface="Arial" pitchFamily="34" charset="-120"/>
+              </a:rPr>
+              <a:t>En las actividades de ambos módulos irás construyendo, pieza a pieza, tu propia aplicación con esta misma estructura.</a:t>
+            </a:r>
+            <a:endParaRPr lang="en-US" sz="1900" dirty="0"/>
+          </a:p>
+        </p:txBody>
+      </p:sp>
+      <p:pic>
+        <p:nvPicPr>
+          <p:cNvPr id="9" name="Imagen 8">
+            <a:extLst>
+              <a:ext uri="{FF2B5EF4-FFF2-40B4-BE49-F238E27FC236}">
+                <a16:creationId xmlns:a16="http://schemas.microsoft.com/office/drawing/2014/main" id="{0FA034A1-04EF-4ACE-5B13-CAC97A11B075}"/>
+              </a:ext>
+            </a:extLst>
+          </p:cNvPr>
+          <p:cNvPicPr>
+            <a:picLocks noChangeAspect="1"/>
+          </p:cNvPicPr>
+          <p:nvPr/>
+        </p:nvPicPr>
+        <p:blipFill>
+          <a:blip r:embed="rId3"/>
+          <a:srcRect t="19320" b="23809"/>
+          <a:stretch>
+            <a:fillRect/>
+          </a:stretch>
+        </p:blipFill>
+        <p:spPr>
+          <a:xfrm>
+            <a:off x="1614197" y="908355"/>
+            <a:ext cx="8745649" cy="3315812"/>
+          </a:xfrm>
+          <a:prstGeom prst="rect">
+            <a:avLst/>
+          </a:prstGeom>
+        </p:spPr>
+      </p:pic>
+    </p:spTree>
+  </p:cSld>
+  <p:clrMapOvr>
+    <a:masterClrMapping/>
+  </p:clrMapOvr>
+</p:sld>
+</file>
+
+<file path=ppt/slides/slide21.xml><?xml version="1.0" encoding="utf-8"?>
+<p:sld xmlns:a="http://schemas.openxmlformats.org/drawingml/2006/main" xmlns:r="http://schemas.openxmlformats.org/officeDocument/2006/relationships" xmlns:p="http://schemas.openxmlformats.org/presentationml/2006/main">
   <p:cSld name="Slide 20">
     <p:spTree>
       <p:nvGrpSpPr>
@@ -7361,7 +7792,7 @@
 </p:sld>
 </file>
 
-<file path=ppt/slides/slide21.xml><?xml version="1.0" encoding="utf-8"?>
+<file path=ppt/slides/slide22.xml><?xml version="1.0" encoding="utf-8"?>
 <p:sld xmlns:a="http://schemas.openxmlformats.org/drawingml/2006/main" xmlns:r="http://schemas.openxmlformats.org/officeDocument/2006/relationships" xmlns:p="http://schemas.openxmlformats.org/presentationml/2006/main">
   <p:cSld name="Slide 21">
     <p:spTree>
@@ -8872,6 +9303,201 @@
 
 <file path=ppt/slides/slide7.xml><?xml version="1.0" encoding="utf-8"?>
 <p:sld xmlns:a="http://schemas.openxmlformats.org/drawingml/2006/main" xmlns:r="http://schemas.openxmlformats.org/officeDocument/2006/relationships" xmlns:p="http://schemas.openxmlformats.org/presentationml/2006/main">
+  <p:cSld>
+    <p:spTree>
+      <p:nvGrpSpPr>
+        <p:cNvPr id="1" name="">
+          <a:extLst>
+            <a:ext uri="{FF2B5EF4-FFF2-40B4-BE49-F238E27FC236}">
+              <a16:creationId xmlns:a16="http://schemas.microsoft.com/office/drawing/2014/main" id="{B73001B1-C3AC-DDFE-558C-39E900363021}"/>
+            </a:ext>
+          </a:extLst>
+        </p:cNvPr>
+        <p:cNvGrpSpPr/>
+        <p:nvPr/>
+      </p:nvGrpSpPr>
+      <p:grpSpPr>
+        <a:xfrm>
+          <a:off x="0" y="0"/>
+          <a:ext cx="0" cy="0"/>
+          <a:chOff x="0" y="0"/>
+          <a:chExt cx="0" cy="0"/>
+        </a:xfrm>
+      </p:grpSpPr>
+      <p:sp>
+        <p:nvSpPr>
+          <p:cNvPr id="2" name="Shape 0">
+            <a:extLst>
+              <a:ext uri="{FF2B5EF4-FFF2-40B4-BE49-F238E27FC236}">
+                <a16:creationId xmlns:a16="http://schemas.microsoft.com/office/drawing/2014/main" id="{0CCDAC2D-A54C-E903-BC3B-FFECE129073F}"/>
+              </a:ext>
+            </a:extLst>
+          </p:cNvPr>
+          <p:cNvSpPr/>
+          <p:nvPr/>
+        </p:nvSpPr>
+        <p:spPr>
+          <a:xfrm>
+            <a:off x="0" y="0"/>
+            <a:ext cx="12188952" cy="777240"/>
+          </a:xfrm>
+          <a:prstGeom prst="rect">
+            <a:avLst/>
+          </a:prstGeom>
+          <a:solidFill>
+            <a:srgbClr val="7F0000"/>
+          </a:solidFill>
+          <a:ln w="12700">
+            <a:solidFill>
+              <a:srgbClr val="7F0000"/>
+            </a:solidFill>
+            <a:prstDash val="solid"/>
+          </a:ln>
+        </p:spPr>
+        <p:txBody>
+          <a:bodyPr/>
+          <a:lstStyle/>
+          <a:p>
+            <a:endParaRPr lang="es-ES"/>
+          </a:p>
+        </p:txBody>
+      </p:sp>
+      <p:sp>
+        <p:nvSpPr>
+          <p:cNvPr id="3" name="Text 1">
+            <a:extLst>
+              <a:ext uri="{FF2B5EF4-FFF2-40B4-BE49-F238E27FC236}">
+                <a16:creationId xmlns:a16="http://schemas.microsoft.com/office/drawing/2014/main" id="{6AB664F0-F304-D1C3-711F-8AA36C9D139C}"/>
+              </a:ext>
+            </a:extLst>
+          </p:cNvPr>
+          <p:cNvSpPr/>
+          <p:nvPr/>
+        </p:nvSpPr>
+        <p:spPr>
+          <a:xfrm>
+            <a:off x="365760" y="0"/>
+            <a:ext cx="11457432" cy="777240"/>
+          </a:xfrm>
+          <a:prstGeom prst="rect">
+            <a:avLst/>
+          </a:prstGeom>
+          <a:noFill/>
+          <a:ln/>
+        </p:spPr>
+        <p:txBody>
+          <a:bodyPr wrap="square" rtlCol="0" anchor="ctr"/>
+          <a:lstStyle/>
+          <a:p>
+            <a:pPr marL="0" indent="0">
+              <a:buNone/>
+            </a:pPr>
+            <a:r>
+              <a:rPr lang="en-US" sz="2600" b="1" dirty="0">
+                <a:solidFill>
+                  <a:srgbClr val="FFFFFF"/>
+                </a:solidFill>
+                <a:latin typeface="Arial" pitchFamily="34" charset="0"/>
+                <a:ea typeface="Arial" pitchFamily="34" charset="-122"/>
+                <a:cs typeface="Arial" pitchFamily="34" charset="-120"/>
+              </a:rPr>
+              <a:t>Maven y el pom.xml</a:t>
+            </a:r>
+            <a:endParaRPr lang="en-US" sz="2600" dirty="0"/>
+          </a:p>
+        </p:txBody>
+      </p:sp>
+      <p:sp>
+        <p:nvSpPr>
+          <p:cNvPr id="4" name="Text 2">
+            <a:extLst>
+              <a:ext uri="{FF2B5EF4-FFF2-40B4-BE49-F238E27FC236}">
+                <a16:creationId xmlns:a16="http://schemas.microsoft.com/office/drawing/2014/main" id="{0F2A72A6-FA20-0E7E-19C9-21F6DEB756EA}"/>
+              </a:ext>
+            </a:extLst>
+          </p:cNvPr>
+          <p:cNvSpPr/>
+          <p:nvPr/>
+        </p:nvSpPr>
+        <p:spPr>
+          <a:xfrm>
+            <a:off x="548640" y="6473952"/>
+            <a:ext cx="11091672" cy="292608"/>
+          </a:xfrm>
+          <a:prstGeom prst="rect">
+            <a:avLst/>
+          </a:prstGeom>
+          <a:noFill/>
+          <a:ln/>
+        </p:spPr>
+        <p:txBody>
+          <a:bodyPr wrap="square" rtlCol="0" anchor="ctr"/>
+          <a:lstStyle/>
+          <a:p>
+            <a:pPr marL="0" indent="0" algn="r">
+              <a:buNone/>
+            </a:pPr>
+            <a:r>
+              <a:rPr lang="en-US" sz="1100" dirty="0">
+                <a:solidFill>
+                  <a:srgbClr val="757575"/>
+                </a:solidFill>
+                <a:latin typeface="Arial" pitchFamily="34" charset="0"/>
+                <a:ea typeface="Arial" pitchFamily="34" charset="-122"/>
+                <a:cs typeface="Arial" pitchFamily="34" charset="-120"/>
+              </a:rPr>
+              <a:t>Acceso a Datos — Tema 1: Fundamentos de Spring Boot</a:t>
+            </a:r>
+            <a:endParaRPr lang="en-US" sz="1100" dirty="0"/>
+          </a:p>
+        </p:txBody>
+      </p:sp>
+      <p:pic>
+        <p:nvPicPr>
+          <p:cNvPr id="11" name="Imagen 10">
+            <a:extLst>
+              <a:ext uri="{FF2B5EF4-FFF2-40B4-BE49-F238E27FC236}">
+                <a16:creationId xmlns:a16="http://schemas.microsoft.com/office/drawing/2014/main" id="{1EE5541E-091C-3C78-928A-35BCBBE18601}"/>
+              </a:ext>
+            </a:extLst>
+          </p:cNvPr>
+          <p:cNvPicPr>
+            <a:picLocks noChangeAspect="1"/>
+          </p:cNvPicPr>
+          <p:nvPr/>
+        </p:nvPicPr>
+        <p:blipFill>
+          <a:blip r:embed="rId3"/>
+          <a:srcRect t="3719" b="6110"/>
+          <a:stretch>
+            <a:fillRect/>
+          </a:stretch>
+        </p:blipFill>
+        <p:spPr>
+          <a:xfrm>
+            <a:off x="2784110" y="849085"/>
+            <a:ext cx="6620731" cy="5455844"/>
+          </a:xfrm>
+          <a:prstGeom prst="rect">
+            <a:avLst/>
+          </a:prstGeom>
+        </p:spPr>
+      </p:pic>
+    </p:spTree>
+    <p:extLst>
+      <p:ext uri="{BB962C8B-B14F-4D97-AF65-F5344CB8AC3E}">
+        <p14:creationId xmlns:p14="http://schemas.microsoft.com/office/powerpoint/2010/main" val="1432378034"/>
+      </p:ext>
+    </p:extLst>
+  </p:cSld>
+  <p:clrMapOvr>
+    <a:masterClrMapping/>
+  </p:clrMapOvr>
+</p:sld>
+</file>
+
+<file path=ppt/slides/slide8.xml><?xml version="1.0" encoding="utf-8"?>
+<p:sld xmlns:a="http://schemas.openxmlformats.org/drawingml/2006/main" xmlns:r="http://schemas.openxmlformats.org/officeDocument/2006/relationships" xmlns:p="http://schemas.openxmlformats.org/presentationml/2006/main">
   <p:cSld name="Slide 7">
     <p:spTree>
       <p:nvGrpSpPr>
@@ -9337,7 +9963,7 @@
 </p:sld>
 </file>
 
-<file path=ppt/slides/slide8.xml><?xml version="1.0" encoding="utf-8"?>
+<file path=ppt/slides/slide9.xml><?xml version="1.0" encoding="utf-8"?>
 <p:sld xmlns:a="http://schemas.openxmlformats.org/drawingml/2006/main" xmlns:r="http://schemas.openxmlformats.org/officeDocument/2006/relationships" xmlns:p="http://schemas.openxmlformats.org/presentationml/2006/main">
   <p:cSld name="Slide 8">
     <p:spTree>
@@ -9563,297 +10189,6 @@
               <a:t>Ejemplo — una aplicación que gestiona el catálogo de una librería (LibroController / LibroService / LibroRepository): el controller enruta, el service decide, el repository habla con la base de datos.</a:t>
             </a:r>
             <a:endParaRPr lang="en-US" sz="1900" dirty="0"/>
-          </a:p>
-        </p:txBody>
-      </p:sp>
-    </p:spTree>
-  </p:cSld>
-  <p:clrMapOvr>
-    <a:masterClrMapping/>
-  </p:clrMapOvr>
-</p:sld>
-</file>
-
-<file path=ppt/slides/slide9.xml><?xml version="1.0" encoding="utf-8"?>
-<p:sld xmlns:a="http://schemas.openxmlformats.org/drawingml/2006/main" xmlns:r="http://schemas.openxmlformats.org/officeDocument/2006/relationships" xmlns:p="http://schemas.openxmlformats.org/presentationml/2006/main">
-  <p:cSld name="Slide 9">
-    <p:spTree>
-      <p:nvGrpSpPr>
-        <p:cNvPr id="1" name=""/>
-        <p:cNvGrpSpPr/>
-        <p:nvPr/>
-      </p:nvGrpSpPr>
-      <p:grpSpPr>
-        <a:xfrm>
-          <a:off x="0" y="0"/>
-          <a:ext cx="0" cy="0"/>
-          <a:chOff x="0" y="0"/>
-          <a:chExt cx="0" cy="0"/>
-        </a:xfrm>
-      </p:grpSpPr>
-      <p:sp>
-        <p:nvSpPr>
-          <p:cNvPr id="2" name="Shape 0"/>
-          <p:cNvSpPr/>
-          <p:nvPr/>
-        </p:nvSpPr>
-        <p:spPr>
-          <a:xfrm>
-            <a:off x="0" y="0"/>
-            <a:ext cx="12188952" cy="777240"/>
-          </a:xfrm>
-          <a:prstGeom prst="rect">
-            <a:avLst/>
-          </a:prstGeom>
-          <a:solidFill>
-            <a:srgbClr val="7F0000"/>
-          </a:solidFill>
-          <a:ln w="12700">
-            <a:solidFill>
-              <a:srgbClr val="7F0000"/>
-            </a:solidFill>
-            <a:prstDash val="solid"/>
-          </a:ln>
-        </p:spPr>
-        <p:txBody>
-          <a:bodyPr/>
-          <a:lstStyle/>
-          <a:p>
-            <a:endParaRPr lang="es-ES"/>
-          </a:p>
-        </p:txBody>
-      </p:sp>
-      <p:sp>
-        <p:nvSpPr>
-          <p:cNvPr id="3" name="Text 1"/>
-          <p:cNvSpPr/>
-          <p:nvPr/>
-        </p:nvSpPr>
-        <p:spPr>
-          <a:xfrm>
-            <a:off x="365760" y="0"/>
-            <a:ext cx="11457432" cy="777240"/>
-          </a:xfrm>
-          <a:prstGeom prst="rect">
-            <a:avLst/>
-          </a:prstGeom>
-          <a:noFill/>
-          <a:ln/>
-        </p:spPr>
-        <p:txBody>
-          <a:bodyPr wrap="square" rtlCol="0" anchor="ctr"/>
-          <a:lstStyle/>
-          <a:p>
-            <a:pPr marL="0" indent="0">
-              <a:buNone/>
-            </a:pPr>
-            <a:r>
-              <a:rPr lang="en-US" sz="2600" b="1" dirty="0">
-                <a:solidFill>
-                  <a:srgbClr val="FFFFFF"/>
-                </a:solidFill>
-                <a:latin typeface="Arial" pitchFamily="34" charset="0"/>
-                <a:ea typeface="Arial" pitchFamily="34" charset="-122"/>
-                <a:cs typeface="Arial" pitchFamily="34" charset="-120"/>
-              </a:rPr>
-              <a:t>La arquitectura en capas (cont.)</a:t>
-            </a:r>
-            <a:endParaRPr lang="en-US" sz="2600" dirty="0"/>
-          </a:p>
-        </p:txBody>
-      </p:sp>
-      <p:sp>
-        <p:nvSpPr>
-          <p:cNvPr id="4" name="Text 2"/>
-          <p:cNvSpPr/>
-          <p:nvPr/>
-        </p:nvSpPr>
-        <p:spPr>
-          <a:xfrm>
-            <a:off x="548640" y="6473952"/>
-            <a:ext cx="11091672" cy="292608"/>
-          </a:xfrm>
-          <a:prstGeom prst="rect">
-            <a:avLst/>
-          </a:prstGeom>
-          <a:noFill/>
-          <a:ln/>
-        </p:spPr>
-        <p:txBody>
-          <a:bodyPr wrap="square" rtlCol="0" anchor="ctr"/>
-          <a:lstStyle/>
-          <a:p>
-            <a:pPr marL="0" indent="0" algn="r">
-              <a:buNone/>
-            </a:pPr>
-            <a:r>
-              <a:rPr lang="en-US" sz="1100" dirty="0">
-                <a:solidFill>
-                  <a:srgbClr val="757575"/>
-                </a:solidFill>
-                <a:latin typeface="Arial" pitchFamily="34" charset="0"/>
-                <a:ea typeface="Arial" pitchFamily="34" charset="-122"/>
-                <a:cs typeface="Arial" pitchFamily="34" charset="-120"/>
-              </a:rPr>
-              <a:t>Acceso a Datos — Tema 1: Fundamentos de Spring Boot</a:t>
-            </a:r>
-            <a:endParaRPr lang="en-US" sz="1100" dirty="0"/>
-          </a:p>
-        </p:txBody>
-      </p:sp>
-      <p:sp>
-        <p:nvSpPr>
-          <p:cNvPr id="5" name="Text 3"/>
-          <p:cNvSpPr/>
-          <p:nvPr/>
-        </p:nvSpPr>
-        <p:spPr>
-          <a:xfrm>
-            <a:off x="548640" y="1371600"/>
-            <a:ext cx="11091672" cy="2286000"/>
-          </a:xfrm>
-          <a:prstGeom prst="rect">
-            <a:avLst/>
-          </a:prstGeom>
-          <a:noFill/>
-          <a:ln/>
-        </p:spPr>
-        <p:txBody>
-          <a:bodyPr wrap="square" rtlCol="0" anchor="t"/>
-          <a:lstStyle/>
-          <a:p>
-            <a:pPr marL="190500" indent="-190500">
-              <a:spcAft>
-                <a:spcPts val="1600"/>
-              </a:spcAft>
-              <a:buSzPct val="100000"/>
-              <a:buChar char="•"/>
-            </a:pPr>
-            <a:r>
-              <a:rPr lang="en-US" sz="1900" dirty="0">
-                <a:solidFill>
-                  <a:srgbClr val="212121"/>
-                </a:solidFill>
-                <a:latin typeface="Arial" pitchFamily="34" charset="0"/>
-                <a:ea typeface="Arial" pitchFamily="34" charset="-122"/>
-                <a:cs typeface="Arial" pitchFamily="34" charset="-120"/>
-              </a:rPr>
-              <a:t>Controller (LibroController) — recibe la petición HTTP y la traduce a una llamada Java. No contiene lógica de negocio, solo enruta.</a:t>
-            </a:r>
-            <a:endParaRPr lang="en-US" sz="1900" dirty="0"/>
-          </a:p>
-          <a:p>
-            <a:pPr marL="190500" indent="-190500">
-              <a:spcAft>
-                <a:spcPts val="1600"/>
-              </a:spcAft>
-              <a:buSzPct val="100000"/>
-              <a:buChar char="•"/>
-            </a:pPr>
-            <a:r>
-              <a:rPr lang="en-US" sz="1900" dirty="0">
-                <a:solidFill>
-                  <a:srgbClr val="212121"/>
-                </a:solidFill>
-                <a:latin typeface="Arial" pitchFamily="34" charset="0"/>
-                <a:ea typeface="Arial" pitchFamily="34" charset="-122"/>
-                <a:cs typeface="Arial" pitchFamily="34" charset="-120"/>
-              </a:rPr>
-              <a:t>Service (LibroService) — contiene la lógica: qué hay que comprobar, qué hay que calcular, en qué orden.</a:t>
-            </a:r>
-            <a:endParaRPr lang="en-US" sz="1900" dirty="0"/>
-          </a:p>
-          <a:p>
-            <a:pPr marL="190500" indent="-190500">
-              <a:spcAft>
-                <a:spcPts val="1600"/>
-              </a:spcAft>
-              <a:buSzPct val="100000"/>
-              <a:buChar char="•"/>
-            </a:pPr>
-            <a:r>
-              <a:rPr lang="en-US" sz="1900" dirty="0">
-                <a:solidFill>
-                  <a:srgbClr val="212121"/>
-                </a:solidFill>
-                <a:latin typeface="Arial" pitchFamily="34" charset="0"/>
-                <a:ea typeface="Arial" pitchFamily="34" charset="-122"/>
-                <a:cs typeface="Arial" pitchFamily="34" charset="-120"/>
-              </a:rPr>
-              <a:t>Repository (LibroRepository) — es quien habla con la base de datos.</a:t>
-            </a:r>
-            <a:endParaRPr lang="en-US" sz="1900" dirty="0"/>
-          </a:p>
-        </p:txBody>
-      </p:sp>
-      <p:sp>
-        <p:nvSpPr>
-          <p:cNvPr id="6" name="Shape 4"/>
-          <p:cNvSpPr/>
-          <p:nvPr/>
-        </p:nvSpPr>
-        <p:spPr>
-          <a:xfrm>
-            <a:off x="548640" y="3977640"/>
-            <a:ext cx="11091672" cy="1371600"/>
-          </a:xfrm>
-          <a:prstGeom prst="roundRect">
-            <a:avLst/>
-          </a:prstGeom>
-          <a:solidFill>
-            <a:srgbClr val="FBE9E7"/>
-          </a:solidFill>
-          <a:ln w="19050">
-            <a:solidFill>
-              <a:srgbClr val="E64A19"/>
-            </a:solidFill>
-            <a:prstDash val="solid"/>
-          </a:ln>
-        </p:spPr>
-        <p:txBody>
-          <a:bodyPr/>
-          <a:lstStyle/>
-          <a:p>
-            <a:endParaRPr lang="es-ES"/>
-          </a:p>
-        </p:txBody>
-      </p:sp>
-      <p:sp>
-        <p:nvSpPr>
-          <p:cNvPr id="7" name="Text 5"/>
-          <p:cNvSpPr/>
-          <p:nvPr/>
-        </p:nvSpPr>
-        <p:spPr>
-          <a:xfrm>
-            <a:off x="822960" y="4069080"/>
-            <a:ext cx="10543032" cy="1188720"/>
-          </a:xfrm>
-          <a:prstGeom prst="rect">
-            <a:avLst/>
-          </a:prstGeom>
-          <a:noFill/>
-          <a:ln/>
-        </p:spPr>
-        <p:txBody>
-          <a:bodyPr wrap="square" rtlCol="0" anchor="ctr"/>
-          <a:lstStyle/>
-          <a:p>
-            <a:pPr marL="0" indent="0">
-              <a:buNone/>
-            </a:pPr>
-            <a:r>
-              <a:rPr lang="en-US" sz="1800" dirty="0">
-                <a:solidFill>
-                  <a:srgbClr val="212121"/>
-                </a:solidFill>
-                <a:latin typeface="Arial" pitchFamily="34" charset="0"/>
-                <a:ea typeface="Arial" pitchFamily="34" charset="-122"/>
-                <a:cs typeface="Arial" pitchFamily="34" charset="-120"/>
-              </a:rPr>
-              <a:t>¿Por qué separar así? Cada capa se puede entender, probar y cambiar sin tocar las demás: si cambia la base de datos, solo se toca el repository; si cambia una regla de negocio, solo el service. Regla: cada capa habla solo con la siguiente — el controller nunca accede directamente a la base de datos.</a:t>
-            </a:r>
-            <a:endParaRPr lang="en-US" sz="1800" dirty="0"/>
           </a:p>
         </p:txBody>
       </p:sp>
